--- a/downloads/modules/Python-Lab_Level-03_Functions-and-Scope_Slides.pptx
+++ b/downloads/modules/Python-Lab_Level-03_Functions-and-Scope_Slides.pptx
@@ -4639,6 +4639,63 @@
           </a:p>
         </p:txBody>
       </p:sp>
+      <p:pic>
+        <p:nvPicPr>
+          <p:cNvPr id="28" name="cm-brand" descr=".brand-monkey.png"/>
+          <p:cNvPicPr>
+            <a:picLocks noChangeAspect="1"/>
+          </p:cNvPicPr>
+          <p:nvPr/>
+        </p:nvPicPr>
+        <p:blipFill>
+          <a:blip r:embed="rId3"/>
+          <a:stretch>
+            <a:fillRect/>
+          </a:stretch>
+        </p:blipFill>
+        <p:spPr>
+          <a:xfrm>
+            <a:off x="10972525" y="6343650"/>
+            <a:ext cx="341367" cy="341367"/>
+          </a:xfrm>
+          <a:prstGeom prst="rect">
+            <a:avLst/>
+          </a:prstGeom>
+        </p:spPr>
+      </p:pic>
+      <p:sp>
+        <p:nvSpPr>
+          <p:cNvPr id="29" name="cm-brand-text"/>
+          <p:cNvSpPr txBox="1"/>
+          <p:nvPr/>
+        </p:nvSpPr>
+        <p:spPr>
+          <a:xfrm>
+            <a:off x="8290352" y="6377940"/>
+            <a:ext cx="2560255" cy="274320"/>
+          </a:xfrm>
+          <a:prstGeom prst="rect">
+            <a:avLst/>
+          </a:prstGeom>
+          <a:noFill/>
+        </p:spPr>
+        <p:txBody>
+          <a:bodyPr wrap="none">
+            <a:spAutoFit/>
+          </a:bodyPr>
+          <a:lstStyle/>
+          <a:p>
+            <a:r>
+              <a:rPr sz="1100" b="1">
+                <a:solidFill>
+                  <a:srgbClr val="FFFAF0"/>
+                </a:solidFill>
+              </a:rPr>
+              <a:t>cyphermonkeylabs.com</a:t>
+            </a:r>
+          </a:p>
+        </p:txBody>
+      </p:sp>
     </p:spTree>
   </p:cSld>
   <p:clrMapOvr>
@@ -5648,6 +5705,63 @@
           </a:p>
         </p:txBody>
       </p:sp>
+      <p:pic>
+        <p:nvPicPr>
+          <p:cNvPr id="17" name="cm-brand" descr=".brand-monkey.png"/>
+          <p:cNvPicPr>
+            <a:picLocks noChangeAspect="1"/>
+          </p:cNvPicPr>
+          <p:nvPr/>
+        </p:nvPicPr>
+        <p:blipFill>
+          <a:blip r:embed="rId2"/>
+          <a:stretch>
+            <a:fillRect/>
+          </a:stretch>
+        </p:blipFill>
+        <p:spPr>
+          <a:xfrm>
+            <a:off x="10972525" y="6343650"/>
+            <a:ext cx="341367" cy="341367"/>
+          </a:xfrm>
+          <a:prstGeom prst="rect">
+            <a:avLst/>
+          </a:prstGeom>
+        </p:spPr>
+      </p:pic>
+      <p:sp>
+        <p:nvSpPr>
+          <p:cNvPr id="18" name="cm-brand-text"/>
+          <p:cNvSpPr txBox="1"/>
+          <p:nvPr/>
+        </p:nvSpPr>
+        <p:spPr>
+          <a:xfrm>
+            <a:off x="8290352" y="6377940"/>
+            <a:ext cx="2560255" cy="274320"/>
+          </a:xfrm>
+          <a:prstGeom prst="rect">
+            <a:avLst/>
+          </a:prstGeom>
+          <a:noFill/>
+        </p:spPr>
+        <p:txBody>
+          <a:bodyPr wrap="none">
+            <a:spAutoFit/>
+          </a:bodyPr>
+          <a:lstStyle/>
+          <a:p>
+            <a:r>
+              <a:rPr sz="1100" b="1">
+                <a:solidFill>
+                  <a:srgbClr val="FFFAF0"/>
+                </a:solidFill>
+              </a:rPr>
+              <a:t>cyphermonkeylabs.com</a:t>
+            </a:r>
+          </a:p>
+        </p:txBody>
+      </p:sp>
     </p:spTree>
   </p:cSld>
   <p:clrMapOvr>
@@ -6226,6 +6340,63 @@
           </a:p>
         </p:txBody>
       </p:sp>
+      <p:pic>
+        <p:nvPicPr>
+          <p:cNvPr id="13" name="cm-brand" descr=".brand-monkey.png"/>
+          <p:cNvPicPr>
+            <a:picLocks noChangeAspect="1"/>
+          </p:cNvPicPr>
+          <p:nvPr/>
+        </p:nvPicPr>
+        <p:blipFill>
+          <a:blip r:embed="rId2"/>
+          <a:stretch>
+            <a:fillRect/>
+          </a:stretch>
+        </p:blipFill>
+        <p:spPr>
+          <a:xfrm>
+            <a:off x="10972525" y="6343650"/>
+            <a:ext cx="341367" cy="341367"/>
+          </a:xfrm>
+          <a:prstGeom prst="rect">
+            <a:avLst/>
+          </a:prstGeom>
+        </p:spPr>
+      </p:pic>
+      <p:sp>
+        <p:nvSpPr>
+          <p:cNvPr id="14" name="cm-brand-text"/>
+          <p:cNvSpPr txBox="1"/>
+          <p:nvPr/>
+        </p:nvSpPr>
+        <p:spPr>
+          <a:xfrm>
+            <a:off x="8290352" y="6377940"/>
+            <a:ext cx="2560255" cy="274320"/>
+          </a:xfrm>
+          <a:prstGeom prst="rect">
+            <a:avLst/>
+          </a:prstGeom>
+          <a:noFill/>
+        </p:spPr>
+        <p:txBody>
+          <a:bodyPr wrap="none">
+            <a:spAutoFit/>
+          </a:bodyPr>
+          <a:lstStyle/>
+          <a:p>
+            <a:r>
+              <a:rPr sz="1100" b="1">
+                <a:solidFill>
+                  <a:srgbClr val="FFFAF0"/>
+                </a:solidFill>
+              </a:rPr>
+              <a:t>cyphermonkeylabs.com</a:t>
+            </a:r>
+          </a:p>
+        </p:txBody>
+      </p:sp>
     </p:spTree>
   </p:cSld>
   <p:clrMapOvr>
@@ -7030,6 +7201,63 @@
           </a:p>
         </p:txBody>
       </p:sp>
+      <p:pic>
+        <p:nvPicPr>
+          <p:cNvPr id="13" name="cm-brand" descr=".brand-monkey.png"/>
+          <p:cNvPicPr>
+            <a:picLocks noChangeAspect="1"/>
+          </p:cNvPicPr>
+          <p:nvPr/>
+        </p:nvPicPr>
+        <p:blipFill>
+          <a:blip r:embed="rId2"/>
+          <a:stretch>
+            <a:fillRect/>
+          </a:stretch>
+        </p:blipFill>
+        <p:spPr>
+          <a:xfrm>
+            <a:off x="10972525" y="6343650"/>
+            <a:ext cx="341367" cy="341367"/>
+          </a:xfrm>
+          <a:prstGeom prst="rect">
+            <a:avLst/>
+          </a:prstGeom>
+        </p:spPr>
+      </p:pic>
+      <p:sp>
+        <p:nvSpPr>
+          <p:cNvPr id="14" name="cm-brand-text"/>
+          <p:cNvSpPr txBox="1"/>
+          <p:nvPr/>
+        </p:nvSpPr>
+        <p:spPr>
+          <a:xfrm>
+            <a:off x="8290352" y="6377940"/>
+            <a:ext cx="2560255" cy="274320"/>
+          </a:xfrm>
+          <a:prstGeom prst="rect">
+            <a:avLst/>
+          </a:prstGeom>
+          <a:noFill/>
+        </p:spPr>
+        <p:txBody>
+          <a:bodyPr wrap="none">
+            <a:spAutoFit/>
+          </a:bodyPr>
+          <a:lstStyle/>
+          <a:p>
+            <a:r>
+              <a:rPr sz="1100" b="1">
+                <a:solidFill>
+                  <a:srgbClr val="FFFAF0"/>
+                </a:solidFill>
+              </a:rPr>
+              <a:t>cyphermonkeylabs.com</a:t>
+            </a:r>
+          </a:p>
+        </p:txBody>
+      </p:sp>
     </p:spTree>
   </p:cSld>
   <p:clrMapOvr>
@@ -7587,6 +7815,63 @@
           </a:p>
         </p:txBody>
       </p:sp>
+      <p:pic>
+        <p:nvPicPr>
+          <p:cNvPr id="13" name="cm-brand" descr=".brand-monkey.png"/>
+          <p:cNvPicPr>
+            <a:picLocks noChangeAspect="1"/>
+          </p:cNvPicPr>
+          <p:nvPr/>
+        </p:nvPicPr>
+        <p:blipFill>
+          <a:blip r:embed="rId2"/>
+          <a:stretch>
+            <a:fillRect/>
+          </a:stretch>
+        </p:blipFill>
+        <p:spPr>
+          <a:xfrm>
+            <a:off x="10972525" y="6343650"/>
+            <a:ext cx="341367" cy="341367"/>
+          </a:xfrm>
+          <a:prstGeom prst="rect">
+            <a:avLst/>
+          </a:prstGeom>
+        </p:spPr>
+      </p:pic>
+      <p:sp>
+        <p:nvSpPr>
+          <p:cNvPr id="14" name="cm-brand-text"/>
+          <p:cNvSpPr txBox="1"/>
+          <p:nvPr/>
+        </p:nvSpPr>
+        <p:spPr>
+          <a:xfrm>
+            <a:off x="8290352" y="6377940"/>
+            <a:ext cx="2560255" cy="274320"/>
+          </a:xfrm>
+          <a:prstGeom prst="rect">
+            <a:avLst/>
+          </a:prstGeom>
+          <a:noFill/>
+        </p:spPr>
+        <p:txBody>
+          <a:bodyPr wrap="none">
+            <a:spAutoFit/>
+          </a:bodyPr>
+          <a:lstStyle/>
+          <a:p>
+            <a:r>
+              <a:rPr sz="1100" b="1">
+                <a:solidFill>
+                  <a:srgbClr val="FFFAF0"/>
+                </a:solidFill>
+              </a:rPr>
+              <a:t>cyphermonkeylabs.com</a:t>
+            </a:r>
+          </a:p>
+        </p:txBody>
+      </p:sp>
     </p:spTree>
   </p:cSld>
   <p:clrMapOvr>
@@ -8262,6 +8547,63 @@
           </a:p>
         </p:txBody>
       </p:sp>
+      <p:pic>
+        <p:nvPicPr>
+          <p:cNvPr id="14" name="cm-brand" descr=".brand-monkey.png"/>
+          <p:cNvPicPr>
+            <a:picLocks noChangeAspect="1"/>
+          </p:cNvPicPr>
+          <p:nvPr/>
+        </p:nvPicPr>
+        <p:blipFill>
+          <a:blip r:embed="rId2"/>
+          <a:stretch>
+            <a:fillRect/>
+          </a:stretch>
+        </p:blipFill>
+        <p:spPr>
+          <a:xfrm>
+            <a:off x="10972525" y="6343650"/>
+            <a:ext cx="341367" cy="341367"/>
+          </a:xfrm>
+          <a:prstGeom prst="rect">
+            <a:avLst/>
+          </a:prstGeom>
+        </p:spPr>
+      </p:pic>
+      <p:sp>
+        <p:nvSpPr>
+          <p:cNvPr id="15" name="cm-brand-text"/>
+          <p:cNvSpPr txBox="1"/>
+          <p:nvPr/>
+        </p:nvSpPr>
+        <p:spPr>
+          <a:xfrm>
+            <a:off x="8290352" y="6377940"/>
+            <a:ext cx="2560255" cy="274320"/>
+          </a:xfrm>
+          <a:prstGeom prst="rect">
+            <a:avLst/>
+          </a:prstGeom>
+          <a:noFill/>
+        </p:spPr>
+        <p:txBody>
+          <a:bodyPr wrap="none">
+            <a:spAutoFit/>
+          </a:bodyPr>
+          <a:lstStyle/>
+          <a:p>
+            <a:r>
+              <a:rPr sz="1100" b="1">
+                <a:solidFill>
+                  <a:srgbClr val="FFFAF0"/>
+                </a:solidFill>
+              </a:rPr>
+              <a:t>cyphermonkeylabs.com</a:t>
+            </a:r>
+          </a:p>
+        </p:txBody>
+      </p:sp>
     </p:spTree>
   </p:cSld>
   <p:clrMapOvr>
@@ -9189,6 +9531,63 @@
           </a:p>
         </p:txBody>
       </p:sp>
+      <p:pic>
+        <p:nvPicPr>
+          <p:cNvPr id="19" name="cm-brand" descr=".brand-monkey.png"/>
+          <p:cNvPicPr>
+            <a:picLocks noChangeAspect="1"/>
+          </p:cNvPicPr>
+          <p:nvPr/>
+        </p:nvPicPr>
+        <p:blipFill>
+          <a:blip r:embed="rId2"/>
+          <a:stretch>
+            <a:fillRect/>
+          </a:stretch>
+        </p:blipFill>
+        <p:spPr>
+          <a:xfrm>
+            <a:off x="10972525" y="6343650"/>
+            <a:ext cx="341367" cy="341367"/>
+          </a:xfrm>
+          <a:prstGeom prst="rect">
+            <a:avLst/>
+          </a:prstGeom>
+        </p:spPr>
+      </p:pic>
+      <p:sp>
+        <p:nvSpPr>
+          <p:cNvPr id="20" name="cm-brand-text"/>
+          <p:cNvSpPr txBox="1"/>
+          <p:nvPr/>
+        </p:nvSpPr>
+        <p:spPr>
+          <a:xfrm>
+            <a:off x="8290352" y="6377940"/>
+            <a:ext cx="2560255" cy="274320"/>
+          </a:xfrm>
+          <a:prstGeom prst="rect">
+            <a:avLst/>
+          </a:prstGeom>
+          <a:noFill/>
+        </p:spPr>
+        <p:txBody>
+          <a:bodyPr wrap="none">
+            <a:spAutoFit/>
+          </a:bodyPr>
+          <a:lstStyle/>
+          <a:p>
+            <a:r>
+              <a:rPr sz="1100" b="1">
+                <a:solidFill>
+                  <a:srgbClr val="FFFAF0"/>
+                </a:solidFill>
+              </a:rPr>
+              <a:t>cyphermonkeylabs.com</a:t>
+            </a:r>
+          </a:p>
+        </p:txBody>
+      </p:sp>
     </p:spTree>
   </p:cSld>
   <p:clrMapOvr>
@@ -9822,6 +10221,63 @@
           </a:p>
         </p:txBody>
       </p:sp>
+      <p:pic>
+        <p:nvPicPr>
+          <p:cNvPr id="13" name="cm-brand" descr=".brand-monkey.png"/>
+          <p:cNvPicPr>
+            <a:picLocks noChangeAspect="1"/>
+          </p:cNvPicPr>
+          <p:nvPr/>
+        </p:nvPicPr>
+        <p:blipFill>
+          <a:blip r:embed="rId2"/>
+          <a:stretch>
+            <a:fillRect/>
+          </a:stretch>
+        </p:blipFill>
+        <p:spPr>
+          <a:xfrm>
+            <a:off x="10972525" y="6343650"/>
+            <a:ext cx="341367" cy="341367"/>
+          </a:xfrm>
+          <a:prstGeom prst="rect">
+            <a:avLst/>
+          </a:prstGeom>
+        </p:spPr>
+      </p:pic>
+      <p:sp>
+        <p:nvSpPr>
+          <p:cNvPr id="14" name="cm-brand-text"/>
+          <p:cNvSpPr txBox="1"/>
+          <p:nvPr/>
+        </p:nvSpPr>
+        <p:spPr>
+          <a:xfrm>
+            <a:off x="8290352" y="6377940"/>
+            <a:ext cx="2560255" cy="274320"/>
+          </a:xfrm>
+          <a:prstGeom prst="rect">
+            <a:avLst/>
+          </a:prstGeom>
+          <a:noFill/>
+        </p:spPr>
+        <p:txBody>
+          <a:bodyPr wrap="none">
+            <a:spAutoFit/>
+          </a:bodyPr>
+          <a:lstStyle/>
+          <a:p>
+            <a:r>
+              <a:rPr sz="1100" b="1">
+                <a:solidFill>
+                  <a:srgbClr val="FFFAF0"/>
+                </a:solidFill>
+              </a:rPr>
+              <a:t>cyphermonkeylabs.com</a:t>
+            </a:r>
+          </a:p>
+        </p:txBody>
+      </p:sp>
     </p:spTree>
   </p:cSld>
   <p:clrMapOvr>
@@ -10440,6 +10896,63 @@
           </a:p>
         </p:txBody>
       </p:sp>
+      <p:pic>
+        <p:nvPicPr>
+          <p:cNvPr id="14" name="cm-brand" descr=".brand-monkey.png"/>
+          <p:cNvPicPr>
+            <a:picLocks noChangeAspect="1"/>
+          </p:cNvPicPr>
+          <p:nvPr/>
+        </p:nvPicPr>
+        <p:blipFill>
+          <a:blip r:embed="rId2"/>
+          <a:stretch>
+            <a:fillRect/>
+          </a:stretch>
+        </p:blipFill>
+        <p:spPr>
+          <a:xfrm>
+            <a:off x="10972525" y="6343650"/>
+            <a:ext cx="341367" cy="341367"/>
+          </a:xfrm>
+          <a:prstGeom prst="rect">
+            <a:avLst/>
+          </a:prstGeom>
+        </p:spPr>
+      </p:pic>
+      <p:sp>
+        <p:nvSpPr>
+          <p:cNvPr id="15" name="cm-brand-text"/>
+          <p:cNvSpPr txBox="1"/>
+          <p:nvPr/>
+        </p:nvSpPr>
+        <p:spPr>
+          <a:xfrm>
+            <a:off x="8290352" y="6377940"/>
+            <a:ext cx="2560255" cy="274320"/>
+          </a:xfrm>
+          <a:prstGeom prst="rect">
+            <a:avLst/>
+          </a:prstGeom>
+          <a:noFill/>
+        </p:spPr>
+        <p:txBody>
+          <a:bodyPr wrap="none">
+            <a:spAutoFit/>
+          </a:bodyPr>
+          <a:lstStyle/>
+          <a:p>
+            <a:r>
+              <a:rPr sz="1100" b="1">
+                <a:solidFill>
+                  <a:srgbClr val="FFFAF0"/>
+                </a:solidFill>
+              </a:rPr>
+              <a:t>cyphermonkeylabs.com</a:t>
+            </a:r>
+          </a:p>
+        </p:txBody>
+      </p:sp>
     </p:spTree>
   </p:cSld>
   <p:clrMapOvr>
@@ -11367,6 +11880,63 @@
           </a:p>
         </p:txBody>
       </p:sp>
+      <p:pic>
+        <p:nvPicPr>
+          <p:cNvPr id="19" name="cm-brand" descr=".brand-monkey.png"/>
+          <p:cNvPicPr>
+            <a:picLocks noChangeAspect="1"/>
+          </p:cNvPicPr>
+          <p:nvPr/>
+        </p:nvPicPr>
+        <p:blipFill>
+          <a:blip r:embed="rId2"/>
+          <a:stretch>
+            <a:fillRect/>
+          </a:stretch>
+        </p:blipFill>
+        <p:spPr>
+          <a:xfrm>
+            <a:off x="10972525" y="6343650"/>
+            <a:ext cx="341367" cy="341367"/>
+          </a:xfrm>
+          <a:prstGeom prst="rect">
+            <a:avLst/>
+          </a:prstGeom>
+        </p:spPr>
+      </p:pic>
+      <p:sp>
+        <p:nvSpPr>
+          <p:cNvPr id="20" name="cm-brand-text"/>
+          <p:cNvSpPr txBox="1"/>
+          <p:nvPr/>
+        </p:nvSpPr>
+        <p:spPr>
+          <a:xfrm>
+            <a:off x="8290352" y="6377940"/>
+            <a:ext cx="2560255" cy="274320"/>
+          </a:xfrm>
+          <a:prstGeom prst="rect">
+            <a:avLst/>
+          </a:prstGeom>
+          <a:noFill/>
+        </p:spPr>
+        <p:txBody>
+          <a:bodyPr wrap="none">
+            <a:spAutoFit/>
+          </a:bodyPr>
+          <a:lstStyle/>
+          <a:p>
+            <a:r>
+              <a:rPr sz="1100" b="1">
+                <a:solidFill>
+                  <a:srgbClr val="FFFAF0"/>
+                </a:solidFill>
+              </a:rPr>
+              <a:t>cyphermonkeylabs.com</a:t>
+            </a:r>
+          </a:p>
+        </p:txBody>
+      </p:sp>
     </p:spTree>
   </p:cSld>
   <p:clrMapOvr>
@@ -12148,6 +12718,63 @@
           </a:p>
         </p:txBody>
       </p:sp>
+      <p:pic>
+        <p:nvPicPr>
+          <p:cNvPr id="16" name="cm-brand" descr=".brand-monkey.png"/>
+          <p:cNvPicPr>
+            <a:picLocks noChangeAspect="1"/>
+          </p:cNvPicPr>
+          <p:nvPr/>
+        </p:nvPicPr>
+        <p:blipFill>
+          <a:blip r:embed="rId2"/>
+          <a:stretch>
+            <a:fillRect/>
+          </a:stretch>
+        </p:blipFill>
+        <p:spPr>
+          <a:xfrm>
+            <a:off x="10972525" y="6343650"/>
+            <a:ext cx="341367" cy="341367"/>
+          </a:xfrm>
+          <a:prstGeom prst="rect">
+            <a:avLst/>
+          </a:prstGeom>
+        </p:spPr>
+      </p:pic>
+      <p:sp>
+        <p:nvSpPr>
+          <p:cNvPr id="17" name="cm-brand-text"/>
+          <p:cNvSpPr txBox="1"/>
+          <p:nvPr/>
+        </p:nvSpPr>
+        <p:spPr>
+          <a:xfrm>
+            <a:off x="8290352" y="6377940"/>
+            <a:ext cx="2560255" cy="274320"/>
+          </a:xfrm>
+          <a:prstGeom prst="rect">
+            <a:avLst/>
+          </a:prstGeom>
+          <a:noFill/>
+        </p:spPr>
+        <p:txBody>
+          <a:bodyPr wrap="none">
+            <a:spAutoFit/>
+          </a:bodyPr>
+          <a:lstStyle/>
+          <a:p>
+            <a:r>
+              <a:rPr sz="1100" b="1">
+                <a:solidFill>
+                  <a:srgbClr val="FFFAF0"/>
+                </a:solidFill>
+              </a:rPr>
+              <a:t>cyphermonkeylabs.com</a:t>
+            </a:r>
+          </a:p>
+        </p:txBody>
+      </p:sp>
     </p:spTree>
   </p:cSld>
   <p:clrMapOvr>
@@ -13388,6 +14015,63 @@
           </a:p>
         </p:txBody>
       </p:sp>
+      <p:pic>
+        <p:nvPicPr>
+          <p:cNvPr id="25" name="cm-brand" descr=".brand-monkey.png"/>
+          <p:cNvPicPr>
+            <a:picLocks noChangeAspect="1"/>
+          </p:cNvPicPr>
+          <p:nvPr/>
+        </p:nvPicPr>
+        <p:blipFill>
+          <a:blip r:embed="rId2"/>
+          <a:stretch>
+            <a:fillRect/>
+          </a:stretch>
+        </p:blipFill>
+        <p:spPr>
+          <a:xfrm>
+            <a:off x="10972525" y="6343650"/>
+            <a:ext cx="341367" cy="341367"/>
+          </a:xfrm>
+          <a:prstGeom prst="rect">
+            <a:avLst/>
+          </a:prstGeom>
+        </p:spPr>
+      </p:pic>
+      <p:sp>
+        <p:nvSpPr>
+          <p:cNvPr id="26" name="cm-brand-text"/>
+          <p:cNvSpPr txBox="1"/>
+          <p:nvPr/>
+        </p:nvSpPr>
+        <p:spPr>
+          <a:xfrm>
+            <a:off x="8290352" y="6377940"/>
+            <a:ext cx="2560255" cy="274320"/>
+          </a:xfrm>
+          <a:prstGeom prst="rect">
+            <a:avLst/>
+          </a:prstGeom>
+          <a:noFill/>
+        </p:spPr>
+        <p:txBody>
+          <a:bodyPr wrap="none">
+            <a:spAutoFit/>
+          </a:bodyPr>
+          <a:lstStyle/>
+          <a:p>
+            <a:r>
+              <a:rPr sz="1100" b="1">
+                <a:solidFill>
+                  <a:srgbClr val="FFFAF0"/>
+                </a:solidFill>
+              </a:rPr>
+              <a:t>cyphermonkeylabs.com</a:t>
+            </a:r>
+          </a:p>
+        </p:txBody>
+      </p:sp>
     </p:spTree>
   </p:cSld>
   <p:clrMapOvr>
@@ -14803,6 +15487,63 @@
           </a:p>
         </p:txBody>
       </p:sp>
+      <p:pic>
+        <p:nvPicPr>
+          <p:cNvPr id="26" name="cm-brand" descr=".brand-monkey.png"/>
+          <p:cNvPicPr>
+            <a:picLocks noChangeAspect="1"/>
+          </p:cNvPicPr>
+          <p:nvPr/>
+        </p:nvPicPr>
+        <p:blipFill>
+          <a:blip r:embed="rId2"/>
+          <a:stretch>
+            <a:fillRect/>
+          </a:stretch>
+        </p:blipFill>
+        <p:spPr>
+          <a:xfrm>
+            <a:off x="10972525" y="6343650"/>
+            <a:ext cx="341367" cy="341367"/>
+          </a:xfrm>
+          <a:prstGeom prst="rect">
+            <a:avLst/>
+          </a:prstGeom>
+        </p:spPr>
+      </p:pic>
+      <p:sp>
+        <p:nvSpPr>
+          <p:cNvPr id="27" name="cm-brand-text"/>
+          <p:cNvSpPr txBox="1"/>
+          <p:nvPr/>
+        </p:nvSpPr>
+        <p:spPr>
+          <a:xfrm>
+            <a:off x="8290352" y="6377940"/>
+            <a:ext cx="2560255" cy="274320"/>
+          </a:xfrm>
+          <a:prstGeom prst="rect">
+            <a:avLst/>
+          </a:prstGeom>
+          <a:noFill/>
+        </p:spPr>
+        <p:txBody>
+          <a:bodyPr wrap="none">
+            <a:spAutoFit/>
+          </a:bodyPr>
+          <a:lstStyle/>
+          <a:p>
+            <a:r>
+              <a:rPr sz="1100" b="1">
+                <a:solidFill>
+                  <a:srgbClr val="FFFAF0"/>
+                </a:solidFill>
+              </a:rPr>
+              <a:t>cyphermonkeylabs.com</a:t>
+            </a:r>
+          </a:p>
+        </p:txBody>
+      </p:sp>
     </p:spTree>
   </p:cSld>
   <p:clrMapOvr>
@@ -15584,6 +16325,63 @@
           </a:p>
         </p:txBody>
       </p:sp>
+      <p:pic>
+        <p:nvPicPr>
+          <p:cNvPr id="16" name="cm-brand" descr=".brand-monkey.png"/>
+          <p:cNvPicPr>
+            <a:picLocks noChangeAspect="1"/>
+          </p:cNvPicPr>
+          <p:nvPr/>
+        </p:nvPicPr>
+        <p:blipFill>
+          <a:blip r:embed="rId2"/>
+          <a:stretch>
+            <a:fillRect/>
+          </a:stretch>
+        </p:blipFill>
+        <p:spPr>
+          <a:xfrm>
+            <a:off x="10972525" y="6343650"/>
+            <a:ext cx="341367" cy="341367"/>
+          </a:xfrm>
+          <a:prstGeom prst="rect">
+            <a:avLst/>
+          </a:prstGeom>
+        </p:spPr>
+      </p:pic>
+      <p:sp>
+        <p:nvSpPr>
+          <p:cNvPr id="17" name="cm-brand-text"/>
+          <p:cNvSpPr txBox="1"/>
+          <p:nvPr/>
+        </p:nvSpPr>
+        <p:spPr>
+          <a:xfrm>
+            <a:off x="8290352" y="6377940"/>
+            <a:ext cx="2560255" cy="274320"/>
+          </a:xfrm>
+          <a:prstGeom prst="rect">
+            <a:avLst/>
+          </a:prstGeom>
+          <a:noFill/>
+        </p:spPr>
+        <p:txBody>
+          <a:bodyPr wrap="none">
+            <a:spAutoFit/>
+          </a:bodyPr>
+          <a:lstStyle/>
+          <a:p>
+            <a:r>
+              <a:rPr sz="1100" b="1">
+                <a:solidFill>
+                  <a:srgbClr val="FFFAF0"/>
+                </a:solidFill>
+              </a:rPr>
+              <a:t>cyphermonkeylabs.com</a:t>
+            </a:r>
+          </a:p>
+        </p:txBody>
+      </p:sp>
     </p:spTree>
   </p:cSld>
   <p:clrMapOvr>
@@ -16517,6 +17315,63 @@
           </a:p>
         </p:txBody>
       </p:sp>
+      <p:pic>
+        <p:nvPicPr>
+          <p:cNvPr id="17" name="cm-brand" descr=".brand-monkey.png"/>
+          <p:cNvPicPr>
+            <a:picLocks noChangeAspect="1"/>
+          </p:cNvPicPr>
+          <p:nvPr/>
+        </p:nvPicPr>
+        <p:blipFill>
+          <a:blip r:embed="rId2"/>
+          <a:stretch>
+            <a:fillRect/>
+          </a:stretch>
+        </p:blipFill>
+        <p:spPr>
+          <a:xfrm>
+            <a:off x="10972525" y="6343650"/>
+            <a:ext cx="341367" cy="341367"/>
+          </a:xfrm>
+          <a:prstGeom prst="rect">
+            <a:avLst/>
+          </a:prstGeom>
+        </p:spPr>
+      </p:pic>
+      <p:sp>
+        <p:nvSpPr>
+          <p:cNvPr id="18" name="cm-brand-text"/>
+          <p:cNvSpPr txBox="1"/>
+          <p:nvPr/>
+        </p:nvSpPr>
+        <p:spPr>
+          <a:xfrm>
+            <a:off x="8290352" y="6377940"/>
+            <a:ext cx="2560255" cy="274320"/>
+          </a:xfrm>
+          <a:prstGeom prst="rect">
+            <a:avLst/>
+          </a:prstGeom>
+          <a:noFill/>
+        </p:spPr>
+        <p:txBody>
+          <a:bodyPr wrap="none">
+            <a:spAutoFit/>
+          </a:bodyPr>
+          <a:lstStyle/>
+          <a:p>
+            <a:r>
+              <a:rPr sz="1100" b="1">
+                <a:solidFill>
+                  <a:srgbClr val="FFFAF0"/>
+                </a:solidFill>
+              </a:rPr>
+              <a:t>cyphermonkeylabs.com</a:t>
+            </a:r>
+          </a:p>
+        </p:txBody>
+      </p:sp>
     </p:spTree>
   </p:cSld>
   <p:clrMapOvr>
@@ -17279,6 +18134,63 @@
           </a:p>
         </p:txBody>
       </p:sp>
+      <p:pic>
+        <p:nvPicPr>
+          <p:cNvPr id="16" name="cm-brand" descr=".brand-monkey.png"/>
+          <p:cNvPicPr>
+            <a:picLocks noChangeAspect="1"/>
+          </p:cNvPicPr>
+          <p:nvPr/>
+        </p:nvPicPr>
+        <p:blipFill>
+          <a:blip r:embed="rId2"/>
+          <a:stretch>
+            <a:fillRect/>
+          </a:stretch>
+        </p:blipFill>
+        <p:spPr>
+          <a:xfrm>
+            <a:off x="10972525" y="6343650"/>
+            <a:ext cx="341367" cy="341367"/>
+          </a:xfrm>
+          <a:prstGeom prst="rect">
+            <a:avLst/>
+          </a:prstGeom>
+        </p:spPr>
+      </p:pic>
+      <p:sp>
+        <p:nvSpPr>
+          <p:cNvPr id="17" name="cm-brand-text"/>
+          <p:cNvSpPr txBox="1"/>
+          <p:nvPr/>
+        </p:nvSpPr>
+        <p:spPr>
+          <a:xfrm>
+            <a:off x="8290352" y="6377940"/>
+            <a:ext cx="2560255" cy="274320"/>
+          </a:xfrm>
+          <a:prstGeom prst="rect">
+            <a:avLst/>
+          </a:prstGeom>
+          <a:noFill/>
+        </p:spPr>
+        <p:txBody>
+          <a:bodyPr wrap="none">
+            <a:spAutoFit/>
+          </a:bodyPr>
+          <a:lstStyle/>
+          <a:p>
+            <a:r>
+              <a:rPr sz="1100" b="1">
+                <a:solidFill>
+                  <a:srgbClr val="FFFAF0"/>
+                </a:solidFill>
+              </a:rPr>
+              <a:t>cyphermonkeylabs.com</a:t>
+            </a:r>
+          </a:p>
+        </p:txBody>
+      </p:sp>
     </p:spTree>
   </p:cSld>
   <p:clrMapOvr>
@@ -17876,6 +18788,63 @@
           </a:p>
         </p:txBody>
       </p:sp>
+      <p:pic>
+        <p:nvPicPr>
+          <p:cNvPr id="13" name="cm-brand" descr=".brand-monkey.png"/>
+          <p:cNvPicPr>
+            <a:picLocks noChangeAspect="1"/>
+          </p:cNvPicPr>
+          <p:nvPr/>
+        </p:nvPicPr>
+        <p:blipFill>
+          <a:blip r:embed="rId2"/>
+          <a:stretch>
+            <a:fillRect/>
+          </a:stretch>
+        </p:blipFill>
+        <p:spPr>
+          <a:xfrm>
+            <a:off x="10972525" y="6343650"/>
+            <a:ext cx="341367" cy="341367"/>
+          </a:xfrm>
+          <a:prstGeom prst="rect">
+            <a:avLst/>
+          </a:prstGeom>
+        </p:spPr>
+      </p:pic>
+      <p:sp>
+        <p:nvSpPr>
+          <p:cNvPr id="14" name="cm-brand-text"/>
+          <p:cNvSpPr txBox="1"/>
+          <p:nvPr/>
+        </p:nvSpPr>
+        <p:spPr>
+          <a:xfrm>
+            <a:off x="8290352" y="6377940"/>
+            <a:ext cx="2560255" cy="274320"/>
+          </a:xfrm>
+          <a:prstGeom prst="rect">
+            <a:avLst/>
+          </a:prstGeom>
+          <a:noFill/>
+        </p:spPr>
+        <p:txBody>
+          <a:bodyPr wrap="none">
+            <a:spAutoFit/>
+          </a:bodyPr>
+          <a:lstStyle/>
+          <a:p>
+            <a:r>
+              <a:rPr sz="1100" b="1">
+                <a:solidFill>
+                  <a:srgbClr val="FFFAF0"/>
+                </a:solidFill>
+              </a:rPr>
+              <a:t>cyphermonkeylabs.com</a:t>
+            </a:r>
+          </a:p>
+        </p:txBody>
+      </p:sp>
     </p:spTree>
   </p:cSld>
   <p:clrMapOvr>
@@ -18490,6 +19459,63 @@
           </a:p>
         </p:txBody>
       </p:sp>
+      <p:pic>
+        <p:nvPicPr>
+          <p:cNvPr id="13" name="cm-brand" descr=".brand-monkey.png"/>
+          <p:cNvPicPr>
+            <a:picLocks noChangeAspect="1"/>
+          </p:cNvPicPr>
+          <p:nvPr/>
+        </p:nvPicPr>
+        <p:blipFill>
+          <a:blip r:embed="rId2"/>
+          <a:stretch>
+            <a:fillRect/>
+          </a:stretch>
+        </p:blipFill>
+        <p:spPr>
+          <a:xfrm>
+            <a:off x="10972525" y="6343650"/>
+            <a:ext cx="341367" cy="341367"/>
+          </a:xfrm>
+          <a:prstGeom prst="rect">
+            <a:avLst/>
+          </a:prstGeom>
+        </p:spPr>
+      </p:pic>
+      <p:sp>
+        <p:nvSpPr>
+          <p:cNvPr id="14" name="cm-brand-text"/>
+          <p:cNvSpPr txBox="1"/>
+          <p:nvPr/>
+        </p:nvSpPr>
+        <p:spPr>
+          <a:xfrm>
+            <a:off x="8290352" y="6377940"/>
+            <a:ext cx="2560255" cy="274320"/>
+          </a:xfrm>
+          <a:prstGeom prst="rect">
+            <a:avLst/>
+          </a:prstGeom>
+          <a:noFill/>
+        </p:spPr>
+        <p:txBody>
+          <a:bodyPr wrap="none">
+            <a:spAutoFit/>
+          </a:bodyPr>
+          <a:lstStyle/>
+          <a:p>
+            <a:r>
+              <a:rPr sz="1100" b="1">
+                <a:solidFill>
+                  <a:srgbClr val="FFFAF0"/>
+                </a:solidFill>
+              </a:rPr>
+              <a:t>cyphermonkeylabs.com</a:t>
+            </a:r>
+          </a:p>
+        </p:txBody>
+      </p:sp>
     </p:spTree>
   </p:cSld>
   <p:clrMapOvr>
@@ -19108,6 +20134,63 @@
           </a:p>
         </p:txBody>
       </p:sp>
+      <p:pic>
+        <p:nvPicPr>
+          <p:cNvPr id="14" name="cm-brand" descr=".brand-monkey.png"/>
+          <p:cNvPicPr>
+            <a:picLocks noChangeAspect="1"/>
+          </p:cNvPicPr>
+          <p:nvPr/>
+        </p:nvPicPr>
+        <p:blipFill>
+          <a:blip r:embed="rId2"/>
+          <a:stretch>
+            <a:fillRect/>
+          </a:stretch>
+        </p:blipFill>
+        <p:spPr>
+          <a:xfrm>
+            <a:off x="10972525" y="6343650"/>
+            <a:ext cx="341367" cy="341367"/>
+          </a:xfrm>
+          <a:prstGeom prst="rect">
+            <a:avLst/>
+          </a:prstGeom>
+        </p:spPr>
+      </p:pic>
+      <p:sp>
+        <p:nvSpPr>
+          <p:cNvPr id="15" name="cm-brand-text"/>
+          <p:cNvSpPr txBox="1"/>
+          <p:nvPr/>
+        </p:nvSpPr>
+        <p:spPr>
+          <a:xfrm>
+            <a:off x="8290352" y="6377940"/>
+            <a:ext cx="2560255" cy="274320"/>
+          </a:xfrm>
+          <a:prstGeom prst="rect">
+            <a:avLst/>
+          </a:prstGeom>
+          <a:noFill/>
+        </p:spPr>
+        <p:txBody>
+          <a:bodyPr wrap="none">
+            <a:spAutoFit/>
+          </a:bodyPr>
+          <a:lstStyle/>
+          <a:p>
+            <a:r>
+              <a:rPr sz="1100" b="1">
+                <a:solidFill>
+                  <a:srgbClr val="FFFAF0"/>
+                </a:solidFill>
+              </a:rPr>
+              <a:t>cyphermonkeylabs.com</a:t>
+            </a:r>
+          </a:p>
+        </p:txBody>
+      </p:sp>
     </p:spTree>
   </p:cSld>
   <p:clrMapOvr>
@@ -19904,6 +20987,63 @@
                 <a:latin typeface="Calibri"/>
               </a:rPr>
               <a:t>you declare global or nonlocal.</a:t>
+            </a:r>
+          </a:p>
+        </p:txBody>
+      </p:sp>
+      <p:pic>
+        <p:nvPicPr>
+          <p:cNvPr id="16" name="cm-brand" descr=".brand-monkey.png"/>
+          <p:cNvPicPr>
+            <a:picLocks noChangeAspect="1"/>
+          </p:cNvPicPr>
+          <p:nvPr/>
+        </p:nvPicPr>
+        <p:blipFill>
+          <a:blip r:embed="rId2"/>
+          <a:stretch>
+            <a:fillRect/>
+          </a:stretch>
+        </p:blipFill>
+        <p:spPr>
+          <a:xfrm>
+            <a:off x="10972525" y="6343650"/>
+            <a:ext cx="341367" cy="341367"/>
+          </a:xfrm>
+          <a:prstGeom prst="rect">
+            <a:avLst/>
+          </a:prstGeom>
+        </p:spPr>
+      </p:pic>
+      <p:sp>
+        <p:nvSpPr>
+          <p:cNvPr id="17" name="cm-brand-text"/>
+          <p:cNvSpPr txBox="1"/>
+          <p:nvPr/>
+        </p:nvSpPr>
+        <p:spPr>
+          <a:xfrm>
+            <a:off x="8290352" y="6377940"/>
+            <a:ext cx="2560255" cy="274320"/>
+          </a:xfrm>
+          <a:prstGeom prst="rect">
+            <a:avLst/>
+          </a:prstGeom>
+          <a:noFill/>
+        </p:spPr>
+        <p:txBody>
+          <a:bodyPr wrap="none">
+            <a:spAutoFit/>
+          </a:bodyPr>
+          <a:lstStyle/>
+          <a:p>
+            <a:r>
+              <a:rPr sz="1100" b="1">
+                <a:solidFill>
+                  <a:srgbClr val="FFFAF0"/>
+                </a:solidFill>
+              </a:rPr>
+              <a:t>cyphermonkeylabs.com</a:t>
             </a:r>
           </a:p>
         </p:txBody>
